--- a/lectures/lecture04.pptx
+++ b/lectures/lecture04.pptx
@@ -16470,7 +16470,7 @@
                           </a:solidFill>
                           <a:latin typeface="Arial"/>
                         </a:rPr>
-                        <a:t>C — сила регуляризации, penalty, class_weight</a:t>
+                        <a:t>C — сила регуляризации, class_weight — вес классов</a:t>
                       </a:r>
                     </a:p>
                   </a:txBody>
@@ -18027,7 +18027,7 @@
         <p:spPr>
           <a:xfrm>
             <a:off x="777240" y="1572768"/>
-            <a:ext cx="10637215" cy="3685286"/>
+            <a:ext cx="10637215" cy="3822192"/>
           </a:xfrm>
           <a:prstGeom prst="roundRect">
             <a:avLst>
@@ -18052,13 +18052,13 @@
               </a:lnSpc>
             </a:pPr>
             <a:r>
-              <a:rPr sz="1100" b="0" i="0">
+              <a:rPr sz="900" b="0" i="0">
                 <a:solidFill>
                   <a:srgbClr val="181D27"/>
                 </a:solidFill>
                 <a:latin typeface="Courier New"/>
               </a:rPr>
-              <a:t>from sklearn.linear_model import LogisticRegression</a:t>
+              <a:t>from sklearn.model_selection import GridSearchCV, StratifiedKFold</a:t>
             </a:r>
           </a:p>
           <a:p>
@@ -18068,13 +18068,13 @@
               </a:lnSpc>
             </a:pPr>
             <a:r>
-              <a:rPr sz="1100" b="0" i="0">
+              <a:rPr sz="900" b="0" i="0">
                 <a:solidFill>
                   <a:srgbClr val="181D27"/>
                 </a:solidFill>
                 <a:latin typeface="Courier New"/>
               </a:rPr>
-              <a:t>from sklearn.model_selection import GridSearchCV, StratifiedKFold</a:t>
+              <a:t> </a:t>
             </a:r>
           </a:p>
           <a:p>
@@ -18084,12 +18084,108 @@
               </a:lnSpc>
             </a:pPr>
             <a:r>
-              <a:rPr sz="1100" b="0" i="0">
+              <a:rPr sz="900" b="0" i="0">
                 <a:solidFill>
                   <a:srgbClr val="181D27"/>
                 </a:solidFill>
                 <a:latin typeface="Courier New"/>
               </a:rPr>
+              <a:t>pipe = Pipeline([</a:t>
+            </a:r>
+          </a:p>
+          <a:p>
+            <a:pPr algn="l">
+              <a:lnSpc>
+                <a:spcPct val="116000"/>
+              </a:lnSpc>
+            </a:pPr>
+            <a:r>
+              <a:rPr sz="900" b="0" i="0">
+                <a:solidFill>
+                  <a:srgbClr val="181D27"/>
+                </a:solidFill>
+                <a:latin typeface="Courier New"/>
+              </a:rPr>
+              <a:t>    ("poly", PolynomialFeatures(include_bias=False)),</a:t>
+            </a:r>
+          </a:p>
+          <a:p>
+            <a:pPr algn="l">
+              <a:lnSpc>
+                <a:spcPct val="116000"/>
+              </a:lnSpc>
+            </a:pPr>
+            <a:r>
+              <a:rPr sz="900" b="0" i="0">
+                <a:solidFill>
+                  <a:srgbClr val="181D27"/>
+                </a:solidFill>
+                <a:latin typeface="Courier New"/>
+              </a:rPr>
+              <a:t>    ("scale", StandardScaler()),</a:t>
+            </a:r>
+          </a:p>
+          <a:p>
+            <a:pPr algn="l">
+              <a:lnSpc>
+                <a:spcPct val="116000"/>
+              </a:lnSpc>
+            </a:pPr>
+            <a:r>
+              <a:rPr sz="900" b="0" i="0">
+                <a:solidFill>
+                  <a:srgbClr val="181D27"/>
+                </a:solidFill>
+                <a:latin typeface="Courier New"/>
+              </a:rPr>
+              <a:t>    ("clf", LogisticRegression(max_iter=2000)),</a:t>
+            </a:r>
+          </a:p>
+          <a:p>
+            <a:pPr algn="l">
+              <a:lnSpc>
+                <a:spcPct val="116000"/>
+              </a:lnSpc>
+            </a:pPr>
+            <a:r>
+              <a:rPr sz="900" b="0" i="0">
+                <a:solidFill>
+                  <a:srgbClr val="181D27"/>
+                </a:solidFill>
+                <a:latin typeface="Courier New"/>
+              </a:rPr>
+              <a:t>])</a:t>
+            </a:r>
+          </a:p>
+          <a:p>
+            <a:pPr algn="l">
+              <a:lnSpc>
+                <a:spcPct val="116000"/>
+              </a:lnSpc>
+            </a:pPr>
+            <a:r>
+              <a:rPr sz="900" b="0" i="0">
+                <a:solidFill>
+                  <a:srgbClr val="181D27"/>
+                </a:solidFill>
+                <a:latin typeface="Courier New"/>
+              </a:rPr>
+              <a:t>cv = StratifiedKFold(n_splits=5, shuffle=True, random_state=42)</a:t>
+            </a:r>
+          </a:p>
+          <a:p>
+            <a:pPr algn="l">
+              <a:lnSpc>
+                <a:spcPct val="116000"/>
+              </a:lnSpc>
+            </a:pPr>
+            <a:r>
+              <a:rPr sz="900" b="0" i="0">
+                <a:solidFill>
+                  <a:srgbClr val="181D27"/>
+                </a:solidFill>
+                <a:latin typeface="Courier New"/>
+              </a:rPr>
               <a:t> </a:t>
             </a:r>
           </a:p>
@@ -18100,13 +18196,13 @@
               </a:lnSpc>
             </a:pPr>
             <a:r>
-              <a:rPr sz="1100" b="0" i="0">
-                <a:solidFill>
-                  <a:srgbClr val="181D27"/>
+              <a:rPr sz="900" b="0" i="0">
+                <a:solidFill>
+                  <a:srgbClr val="6B7484"/>
                 </a:solidFill>
                 <a:latin typeface="Courier New"/>
               </a:rPr>
-              <a:t>cv = StratifiedKFold(n_splits=5, shuffle=True, random_state=42)</a:t>
+              <a:t># Параметр шага пайплайна пишется через двойное подчёркивание</a:t>
             </a:r>
           </a:p>
           <a:p>
@@ -18116,12 +18212,92 @@
               </a:lnSpc>
             </a:pPr>
             <a:r>
-              <a:rPr sz="1100" b="0" i="0">
+              <a:rPr sz="900" b="0" i="0">
                 <a:solidFill>
                   <a:srgbClr val="181D27"/>
                 </a:solidFill>
                 <a:latin typeface="Courier New"/>
               </a:rPr>
+              <a:t>grid = {</a:t>
+            </a:r>
+          </a:p>
+          <a:p>
+            <a:pPr algn="l">
+              <a:lnSpc>
+                <a:spcPct val="116000"/>
+              </a:lnSpc>
+            </a:pPr>
+            <a:r>
+              <a:rPr sz="900" b="0" i="0">
+                <a:solidFill>
+                  <a:srgbClr val="181D27"/>
+                </a:solidFill>
+                <a:latin typeface="Courier New"/>
+              </a:rPr>
+              <a:t>    "poly__degree": [1, 2],                  # 2 значения</a:t>
+            </a:r>
+          </a:p>
+          <a:p>
+            <a:pPr algn="l">
+              <a:lnSpc>
+                <a:spcPct val="116000"/>
+              </a:lnSpc>
+            </a:pPr>
+            <a:r>
+              <a:rPr sz="900" b="0" i="0">
+                <a:solidFill>
+                  <a:srgbClr val="181D27"/>
+                </a:solidFill>
+                <a:latin typeface="Courier New"/>
+              </a:rPr>
+              <a:t>    "clf__C": [0.01, 0.1, 1, 10],            # 4</a:t>
+            </a:r>
+          </a:p>
+          <a:p>
+            <a:pPr algn="l">
+              <a:lnSpc>
+                <a:spcPct val="116000"/>
+              </a:lnSpc>
+            </a:pPr>
+            <a:r>
+              <a:rPr sz="900" b="0" i="0">
+                <a:solidFill>
+                  <a:srgbClr val="181D27"/>
+                </a:solidFill>
+                <a:latin typeface="Courier New"/>
+              </a:rPr>
+              <a:t>    "clf__class_weight": [None, "balanced"], # 2</a:t>
+            </a:r>
+          </a:p>
+          <a:p>
+            <a:pPr algn="l">
+              <a:lnSpc>
+                <a:spcPct val="116000"/>
+              </a:lnSpc>
+            </a:pPr>
+            <a:r>
+              <a:rPr sz="900" b="0" i="0">
+                <a:solidFill>
+                  <a:srgbClr val="181D27"/>
+                </a:solidFill>
+                <a:latin typeface="Courier New"/>
+              </a:rPr>
+              <a:t>}</a:t>
+            </a:r>
+          </a:p>
+          <a:p>
+            <a:pPr algn="l">
+              <a:lnSpc>
+                <a:spcPct val="116000"/>
+              </a:lnSpc>
+            </a:pPr>
+            <a:r>
+              <a:rPr sz="900" b="0" i="0">
+                <a:solidFill>
+                  <a:srgbClr val="181D27"/>
+                </a:solidFill>
+                <a:latin typeface="Courier New"/>
+              </a:rPr>
               <a:t> </a:t>
             </a:r>
           </a:p>
@@ -18132,13 +18308,13 @@
               </a:lnSpc>
             </a:pPr>
             <a:r>
-              <a:rPr sz="1100" b="0" i="0">
+              <a:rPr sz="900" b="0" i="0">
                 <a:solidFill>
                   <a:srgbClr val="181D27"/>
                 </a:solidFill>
                 <a:latin typeface="Courier New"/>
               </a:rPr>
-              <a:t>grid = {</a:t>
+              <a:t>search = GridSearchCV(</a:t>
             </a:r>
           </a:p>
           <a:p>
@@ -18148,13 +18324,13 @@
               </a:lnSpc>
             </a:pPr>
             <a:r>
-              <a:rPr sz="1100" b="0" i="0">
+              <a:rPr sz="900" b="0" i="0">
                 <a:solidFill>
                   <a:srgbClr val="181D27"/>
                 </a:solidFill>
                 <a:latin typeface="Courier New"/>
               </a:rPr>
-              <a:t>    "C": [0.01, 0.1, 1, 10],            # 4 значения</a:t>
+              <a:t>    pipe, param_grid=grid, cv=cv,</a:t>
             </a:r>
           </a:p>
           <a:p>
@@ -18164,13 +18340,13 @@
               </a:lnSpc>
             </a:pPr>
             <a:r>
-              <a:rPr sz="1100" b="0" i="0">
+              <a:rPr sz="900" b="0" i="0">
                 <a:solidFill>
                   <a:srgbClr val="181D27"/>
                 </a:solidFill>
                 <a:latin typeface="Courier New"/>
               </a:rPr>
-              <a:t>    "penalty": ["l1", "l2"],            # 2</a:t>
+              <a:t>    scoring="average_precision", n_jobs=-1,</a:t>
             </a:r>
           </a:p>
           <a:p>
@@ -18180,13 +18356,13 @@
               </a:lnSpc>
             </a:pPr>
             <a:r>
-              <a:rPr sz="1100" b="0" i="0">
+              <a:rPr sz="900" b="0" i="0">
                 <a:solidFill>
                   <a:srgbClr val="181D27"/>
                 </a:solidFill>
                 <a:latin typeface="Courier New"/>
               </a:rPr>
-              <a:t>    "class_weight": [None, "balanced"], # 2</a:t>
+              <a:t>)</a:t>
             </a:r>
           </a:p>
           <a:p>
@@ -18196,13 +18372,13 @@
               </a:lnSpc>
             </a:pPr>
             <a:r>
-              <a:rPr sz="1100" b="0" i="0">
+              <a:rPr sz="900" b="0" i="0">
                 <a:solidFill>
                   <a:srgbClr val="181D27"/>
                 </a:solidFill>
                 <a:latin typeface="Courier New"/>
               </a:rPr>
-              <a:t>}</a:t>
+              <a:t>search.fit(X_train, y_train)</a:t>
             </a:r>
           </a:p>
           <a:p>
@@ -18212,137 +18388,41 @@
               </a:lnSpc>
             </a:pPr>
             <a:r>
-              <a:rPr sz="1100" b="0" i="0">
+              <a:rPr sz="900" b="0" i="0">
                 <a:solidFill>
                   <a:srgbClr val="181D27"/>
                 </a:solidFill>
                 <a:latin typeface="Courier New"/>
               </a:rPr>
-              <a:t> </a:t>
-            </a:r>
-          </a:p>
+              <a:t>print(search.best_params_, search.best_score_)</a:t>
+            </a:r>
+          </a:p>
+        </p:txBody>
+      </p:sp>
+      <p:sp>
+        <p:nvSpPr>
+          <p:cNvPr id="5" name="TextBox 4"/>
+          <p:cNvSpPr txBox="1"/>
+          <p:nvPr/>
+        </p:nvSpPr>
+        <p:spPr>
+          <a:xfrm>
+            <a:off x="777240" y="5577840"/>
+            <a:ext cx="10637215" cy="731520"/>
+          </a:xfrm>
+          <a:prstGeom prst="rect">
+            <a:avLst/>
+          </a:prstGeom>
+          <a:noFill/>
+        </p:spPr>
+        <p:txBody>
+          <a:bodyPr wrap="square" lIns="0" rIns="0" tIns="0" bIns="0">
+            <a:spAutoFit/>
+          </a:bodyPr>
+          <a:lstStyle/>
           <a:p>
             <a:pPr algn="l">
               <a:lnSpc>
-                <a:spcPct val="116000"/>
-              </a:lnSpc>
-            </a:pPr>
-            <a:r>
-              <a:rPr sz="1100" b="0" i="0">
-                <a:solidFill>
-                  <a:srgbClr val="181D27"/>
-                </a:solidFill>
-                <a:latin typeface="Courier New"/>
-              </a:rPr>
-              <a:t>search = GridSearchCV(</a:t>
-            </a:r>
-          </a:p>
-          <a:p>
-            <a:pPr algn="l">
-              <a:lnSpc>
-                <a:spcPct val="116000"/>
-              </a:lnSpc>
-            </a:pPr>
-            <a:r>
-              <a:rPr sz="1100" b="0" i="0">
-                <a:solidFill>
-                  <a:srgbClr val="181D27"/>
-                </a:solidFill>
-                <a:latin typeface="Courier New"/>
-              </a:rPr>
-              <a:t>    LogisticRegression(solver="liblinear", max_iter=1000),</a:t>
-            </a:r>
-          </a:p>
-          <a:p>
-            <a:pPr algn="l">
-              <a:lnSpc>
-                <a:spcPct val="116000"/>
-              </a:lnSpc>
-            </a:pPr>
-            <a:r>
-              <a:rPr sz="1100" b="0" i="0">
-                <a:solidFill>
-                  <a:srgbClr val="181D27"/>
-                </a:solidFill>
-                <a:latin typeface="Courier New"/>
-              </a:rPr>
-              <a:t>    param_grid=grid, cv=cv, scoring="average_precision", n_jobs=-1,</a:t>
-            </a:r>
-          </a:p>
-          <a:p>
-            <a:pPr algn="l">
-              <a:lnSpc>
-                <a:spcPct val="116000"/>
-              </a:lnSpc>
-            </a:pPr>
-            <a:r>
-              <a:rPr sz="1100" b="0" i="0">
-                <a:solidFill>
-                  <a:srgbClr val="181D27"/>
-                </a:solidFill>
-                <a:latin typeface="Courier New"/>
-              </a:rPr>
-              <a:t>)</a:t>
-            </a:r>
-          </a:p>
-          <a:p>
-            <a:pPr algn="l">
-              <a:lnSpc>
-                <a:spcPct val="116000"/>
-              </a:lnSpc>
-            </a:pPr>
-            <a:r>
-              <a:rPr sz="1100" b="0" i="0">
-                <a:solidFill>
-                  <a:srgbClr val="181D27"/>
-                </a:solidFill>
-                <a:latin typeface="Courier New"/>
-              </a:rPr>
-              <a:t>search.fit(X_train, y_train)</a:t>
-            </a:r>
-          </a:p>
-          <a:p>
-            <a:pPr algn="l">
-              <a:lnSpc>
-                <a:spcPct val="116000"/>
-              </a:lnSpc>
-            </a:pPr>
-            <a:r>
-              <a:rPr sz="1100" b="0" i="0">
-                <a:solidFill>
-                  <a:srgbClr val="181D27"/>
-                </a:solidFill>
-                <a:latin typeface="Courier New"/>
-              </a:rPr>
-              <a:t>print(search.best_params_, search.best_score_)</a:t>
-            </a:r>
-          </a:p>
-        </p:txBody>
-      </p:sp>
-      <p:sp>
-        <p:nvSpPr>
-          <p:cNvPr id="5" name="TextBox 4"/>
-          <p:cNvSpPr txBox="1"/>
-          <p:nvPr/>
-        </p:nvSpPr>
-        <p:spPr>
-          <a:xfrm>
-            <a:off x="777240" y="5440934"/>
-            <a:ext cx="10637215" cy="731520"/>
-          </a:xfrm>
-          <a:prstGeom prst="rect">
-            <a:avLst/>
-          </a:prstGeom>
-          <a:noFill/>
-        </p:spPr>
-        <p:txBody>
-          <a:bodyPr wrap="square" lIns="0" rIns="0" tIns="0" bIns="0">
-            <a:spAutoFit/>
-          </a:bodyPr>
-          <a:lstStyle/>
-          <a:p>
-            <a:pPr algn="l">
-              <a:lnSpc>
                 <a:spcPct val="120000"/>
               </a:lnSpc>
             </a:pPr>
@@ -18353,7 +18433,7 @@
                 </a:solidFill>
                 <a:latin typeface="Arial"/>
               </a:rPr>
-              <a:t>4 × 2 × 2 = 16 комбинаций, каждая на 5 фолдах — 80 обучений. Добавили пятое значение C — уже 100, а ещё один параметр с тремя значениями — 300.</a:t>
+              <a:t>2 × 4 × 2 = 16 комбинаций, каждая на 5 фолдах — 80 обучений. Добавили пятое значение C — уже 100, а ещё один параметр с тремя значениями — 300.</a:t>
             </a:r>
           </a:p>
         </p:txBody>
@@ -18524,7 +18604,7 @@
         <p:spPr>
           <a:xfrm>
             <a:off x="777240" y="1572768"/>
-            <a:ext cx="10637215" cy="3770376"/>
+            <a:ext cx="10637215" cy="3821430"/>
           </a:xfrm>
           <a:prstGeom prst="roundRect">
             <a:avLst>
@@ -18549,7 +18629,7 @@
               </a:lnSpc>
             </a:pPr>
             <a:r>
-              <a:rPr sz="1200" b="0" i="0">
+              <a:rPr sz="1300" b="0" i="0">
                 <a:solidFill>
                   <a:srgbClr val="181D27"/>
                 </a:solidFill>
@@ -18565,7 +18645,7 @@
               </a:lnSpc>
             </a:pPr>
             <a:r>
-              <a:rPr sz="1200" b="0" i="0">
+              <a:rPr sz="1300" b="0" i="0">
                 <a:solidFill>
                   <a:srgbClr val="181D27"/>
                 </a:solidFill>
@@ -18581,7 +18661,7 @@
               </a:lnSpc>
             </a:pPr>
             <a:r>
-              <a:rPr sz="1200" b="0" i="0">
+              <a:rPr sz="1300" b="0" i="0">
                 <a:solidFill>
                   <a:srgbClr val="181D27"/>
                 </a:solidFill>
@@ -18597,7 +18677,7 @@
               </a:lnSpc>
             </a:pPr>
             <a:r>
-              <a:rPr sz="1200" b="0" i="0">
+              <a:rPr sz="1300" b="0" i="0">
                 <a:solidFill>
                   <a:srgbClr val="181D27"/>
                 </a:solidFill>
@@ -18613,13 +18693,13 @@
               </a:lnSpc>
             </a:pPr>
             <a:r>
-              <a:rPr sz="1200" b="0" i="0">
+              <a:rPr sz="1300" b="0" i="0">
                 <a:solidFill>
                   <a:srgbClr val="181D27"/>
                 </a:solidFill>
                 <a:latin typeface="Courier New"/>
               </a:rPr>
-              <a:t>    "C": loguniform(1e-3, 1e3),         # не список, а распределение</a:t>
+              <a:t>    "poly__degree": [1, 2],</a:t>
             </a:r>
           </a:p>
           <a:p>
@@ -18629,13 +18709,13 @@
               </a:lnSpc>
             </a:pPr>
             <a:r>
-              <a:rPr sz="1200" b="0" i="0">
+              <a:rPr sz="1300" b="0" i="0">
                 <a:solidFill>
                   <a:srgbClr val="181D27"/>
                 </a:solidFill>
                 <a:latin typeface="Courier New"/>
               </a:rPr>
-              <a:t>    "penalty": ["l1", "l2"],</a:t>
+              <a:t>    "clf__C": loguniform(1e-3, 1e3),    # не список, а распределение</a:t>
             </a:r>
           </a:p>
           <a:p>
@@ -18645,13 +18725,13 @@
               </a:lnSpc>
             </a:pPr>
             <a:r>
-              <a:rPr sz="1200" b="0" i="0">
+              <a:rPr sz="1300" b="0" i="0">
                 <a:solidFill>
                   <a:srgbClr val="181D27"/>
                 </a:solidFill>
                 <a:latin typeface="Courier New"/>
               </a:rPr>
-              <a:t>    "class_weight": [None, "balanced"],</a:t>
+              <a:t>    "clf__class_weight": [None, "balanced"],</a:t>
             </a:r>
           </a:p>
           <a:p>
@@ -18661,7 +18741,7 @@
               </a:lnSpc>
             </a:pPr>
             <a:r>
-              <a:rPr sz="1200" b="0" i="0">
+              <a:rPr sz="1300" b="0" i="0">
                 <a:solidFill>
                   <a:srgbClr val="181D27"/>
                 </a:solidFill>
@@ -18677,7 +18757,7 @@
               </a:lnSpc>
             </a:pPr>
             <a:r>
-              <a:rPr sz="1200" b="0" i="0">
+              <a:rPr sz="1300" b="0" i="0">
                 <a:solidFill>
                   <a:srgbClr val="181D27"/>
                 </a:solidFill>
@@ -18693,7 +18773,7 @@
               </a:lnSpc>
             </a:pPr>
             <a:r>
-              <a:rPr sz="1200" b="0" i="0">
+              <a:rPr sz="1300" b="0" i="0">
                 <a:solidFill>
                   <a:srgbClr val="181D27"/>
                 </a:solidFill>
@@ -18709,13 +18789,13 @@
               </a:lnSpc>
             </a:pPr>
             <a:r>
-              <a:rPr sz="1200" b="0" i="0">
+              <a:rPr sz="1300" b="0" i="0">
                 <a:solidFill>
                   <a:srgbClr val="181D27"/>
                 </a:solidFill>
                 <a:latin typeface="Courier New"/>
               </a:rPr>
-              <a:t>    LogisticRegression(solver="liblinear", max_iter=1000),</a:t>
+              <a:t>    pipe, param_distributions=dist, n_iter=40, cv=cv,</a:t>
             </a:r>
           </a:p>
           <a:p>
@@ -18725,13 +18805,13 @@
               </a:lnSpc>
             </a:pPr>
             <a:r>
-              <a:rPr sz="1200" b="0" i="0">
+              <a:rPr sz="1300" b="0" i="0">
                 <a:solidFill>
                   <a:srgbClr val="181D27"/>
                 </a:solidFill>
                 <a:latin typeface="Courier New"/>
               </a:rPr>
-              <a:t>    param_distributions=dist, n_iter=40, cv=cv,</a:t>
+              <a:t>    scoring="average_precision", random_state=42, n_jobs=-1,</a:t>
             </a:r>
           </a:p>
           <a:p>
@@ -18741,13 +18821,13 @@
               </a:lnSpc>
             </a:pPr>
             <a:r>
-              <a:rPr sz="1200" b="0" i="0">
+              <a:rPr sz="1300" b="0" i="0">
                 <a:solidFill>
                   <a:srgbClr val="181D27"/>
                 </a:solidFill>
                 <a:latin typeface="Courier New"/>
               </a:rPr>
-              <a:t>    scoring="average_precision", random_state=42, n_jobs=-1,</a:t>
+              <a:t>)</a:t>
             </a:r>
           </a:p>
           <a:p>
@@ -18757,13 +18837,13 @@
               </a:lnSpc>
             </a:pPr>
             <a:r>
-              <a:rPr sz="1200" b="0" i="0">
+              <a:rPr sz="1300" b="0" i="0">
                 <a:solidFill>
                   <a:srgbClr val="181D27"/>
                 </a:solidFill>
                 <a:latin typeface="Courier New"/>
               </a:rPr>
-              <a:t>)</a:t>
+              <a:t>search.fit(X_train, y_train)</a:t>
             </a:r>
           </a:p>
           <a:p>
@@ -18773,28 +18853,12 @@
               </a:lnSpc>
             </a:pPr>
             <a:r>
-              <a:rPr sz="1200" b="0" i="0">
+              <a:rPr sz="1300" b="0" i="0">
                 <a:solidFill>
                   <a:srgbClr val="181D27"/>
                 </a:solidFill>
                 <a:latin typeface="Courier New"/>
               </a:rPr>
-              <a:t>search.fit(X_train, y_train)</a:t>
-            </a:r>
-          </a:p>
-          <a:p>
-            <a:pPr algn="l">
-              <a:lnSpc>
-                <a:spcPct val="116000"/>
-              </a:lnSpc>
-            </a:pPr>
-            <a:r>
-              <a:rPr sz="1200" b="0" i="0">
-                <a:solidFill>
-                  <a:srgbClr val="181D27"/>
-                </a:solidFill>
-                <a:latin typeface="Courier New"/>
-              </a:rPr>
               <a:t>print(search.best_params_, search.best_score_)</a:t>
             </a:r>
           </a:p>
@@ -18808,7 +18872,7 @@
         </p:nvSpPr>
         <p:spPr>
           <a:xfrm>
-            <a:off x="777240" y="5526024"/>
+            <a:off x="777240" y="5577078"/>
             <a:ext cx="10637215" cy="731520"/>
           </a:xfrm>
           <a:prstGeom prst="rect">

--- a/lectures/lecture04.pptx
+++ b/lectures/lecture04.pptx
@@ -8501,7 +8501,25 @@
                 </a:solidFill>
                 <a:latin typeface="Arial"/>
               </a:rPr>
-              <a:t>В `classification_report` выводятся все три — смотрите на расхождение между ними</a:t>
+              <a:t>В </a:t>
+            </a:r>
+            <a:r>
+              <a:rPr sz="1600" b="0" i="0">
+                <a:solidFill>
+                  <a:srgbClr val="6B7484"/>
+                </a:solidFill>
+                <a:latin typeface="Courier New"/>
+              </a:rPr>
+              <a:t>classification_report</a:t>
+            </a:r>
+            <a:r>
+              <a:rPr sz="1600" b="0" i="0">
+                <a:solidFill>
+                  <a:srgbClr val="6B7484"/>
+                </a:solidFill>
+                <a:latin typeface="Arial"/>
+              </a:rPr>
+              <a:t> выводятся все три — смотрите на расхождение между ними</a:t>
             </a:r>
           </a:p>
         </p:txBody>

--- a/lectures/lecture04.pptx
+++ b/lectures/lecture04.pptx
@@ -3334,7 +3334,7 @@
           <a:p>
             <a:pPr algn="l"/>
             <a:r>
-              <a:rPr sz="1600" b="0" i="0">
+              <a:rPr sz="1700" b="0" i="0">
                 <a:solidFill>
                   <a:srgbClr val="181D27"/>
                 </a:solidFill>
@@ -3468,7 +3468,7 @@
             <a:r>
               <a:rPr sz="1800" b="0" i="0">
                 <a:solidFill>
-                  <a:srgbClr val="6B7484"/>
+                  <a:srgbClr val="181D27"/>
                 </a:solidFill>
                 <a:latin typeface="Arial"/>
               </a:rPr>
@@ -3868,7 +3868,7 @@
               </a:lnSpc>
             </a:pPr>
             <a:r>
-              <a:rPr sz="1700" b="0" i="0">
+              <a:rPr sz="1800" b="0" i="0">
                 <a:solidFill>
                   <a:srgbClr val="181D27"/>
                 </a:solidFill>
@@ -4066,7 +4066,7 @@
             <a:r>
               <a:rPr sz="2000" b="0" i="0">
                 <a:solidFill>
-                  <a:srgbClr val="6B7484"/>
+                  <a:srgbClr val="181D27"/>
                 </a:solidFill>
                 <a:latin typeface="Arial"/>
               </a:rPr>
@@ -4324,7 +4324,7 @@
         <p:spPr>
           <a:xfrm>
             <a:off x="777240" y="4520884"/>
-            <a:ext cx="10637215" cy="827024"/>
+            <a:ext cx="10637215" cy="861568"/>
           </a:xfrm>
           <a:prstGeom prst="rect">
             <a:avLst/>
@@ -4343,9 +4343,9 @@
               </a:lnSpc>
             </a:pPr>
             <a:r>
-              <a:rPr sz="1600" b="0" i="0">
-                <a:solidFill>
-                  <a:srgbClr val="6B7484"/>
+              <a:rPr sz="1700" b="0" i="0">
+                <a:solidFill>
+                  <a:srgbClr val="181D27"/>
                 </a:solidFill>
                 <a:latin typeface="Arial"/>
               </a:rPr>
@@ -4541,7 +4541,7 @@
             <a:r>
               <a:rPr sz="2000" b="0" i="0">
                 <a:solidFill>
-                  <a:srgbClr val="6B7484"/>
+                  <a:srgbClr val="181D27"/>
                 </a:solidFill>
                 <a:latin typeface="Arial"/>
               </a:rPr>
@@ -4587,7 +4587,7 @@
                       <a:r>
                         <a:rPr sz="1500" b="1" i="0">
                           <a:solidFill>
-                            <a:srgbClr val="6B7484"/>
+                            <a:srgbClr val="181D27"/>
                           </a:solidFill>
                           <a:latin typeface="Arial"/>
                         </a:rPr>
@@ -4623,7 +4623,7 @@
                       <a:r>
                         <a:rPr sz="1500" b="1" i="0">
                           <a:solidFill>
-                            <a:srgbClr val="6B7484"/>
+                            <a:srgbClr val="181D27"/>
                           </a:solidFill>
                           <a:latin typeface="Arial"/>
                         </a:rPr>
@@ -4659,7 +4659,7 @@
                       <a:r>
                         <a:rPr sz="1500" b="1" i="0">
                           <a:solidFill>
-                            <a:srgbClr val="6B7484"/>
+                            <a:srgbClr val="181D27"/>
                           </a:solidFill>
                           <a:latin typeface="Arial"/>
                         </a:rPr>
@@ -5236,9 +5236,9 @@
               </a:lnSpc>
             </a:pPr>
             <a:r>
-              <a:rPr sz="1700" b="0" i="0">
-                <a:solidFill>
-                  <a:srgbClr val="6B7484"/>
+              <a:rPr sz="1800" b="0" i="0">
+                <a:solidFill>
+                  <a:srgbClr val="181D27"/>
                 </a:solidFill>
                 <a:latin typeface="Arial"/>
               </a:rPr>
@@ -5434,7 +5434,7 @@
             <a:r>
               <a:rPr sz="2000" b="0" i="0">
                 <a:solidFill>
-                  <a:srgbClr val="6B7484"/>
+                  <a:srgbClr val="181D27"/>
                 </a:solidFill>
                 <a:latin typeface="Arial"/>
               </a:rPr>
@@ -5951,7 +5951,7 @@
               </a:lnSpc>
             </a:pPr>
             <a:r>
-              <a:rPr sz="1600" b="0" i="0">
+              <a:rPr sz="1700" b="0" i="0">
                 <a:solidFill>
                   <a:srgbClr val="181D27"/>
                 </a:solidFill>
@@ -5986,7 +5986,7 @@
           <a:p>
             <a:pPr algn="l"/>
             <a:r>
-              <a:rPr sz="1600" b="1" i="0">
+              <a:rPr sz="1700" b="1" i="0">
                 <a:solidFill>
                   <a:srgbClr val="2B5CE6"/>
                 </a:solidFill>
@@ -6031,7 +6031,7 @@
               </a:lnSpc>
             </a:pPr>
             <a:r>
-              <a:rPr sz="1600" b="0" i="0">
+              <a:rPr sz="1700" b="0" i="0">
                 <a:solidFill>
                   <a:srgbClr val="181D27"/>
                 </a:solidFill>
@@ -6066,7 +6066,7 @@
           <a:p>
             <a:pPr algn="l"/>
             <a:r>
-              <a:rPr sz="1600" b="1" i="0">
+              <a:rPr sz="1700" b="1" i="0">
                 <a:solidFill>
                   <a:srgbClr val="2B5CE6"/>
                 </a:solidFill>
@@ -6111,7 +6111,7 @@
               </a:lnSpc>
             </a:pPr>
             <a:r>
-              <a:rPr sz="1600" b="0" i="0">
+              <a:rPr sz="1700" b="0" i="0">
                 <a:solidFill>
                   <a:srgbClr val="181D27"/>
                 </a:solidFill>
@@ -6146,7 +6146,7 @@
           <a:p>
             <a:pPr algn="l"/>
             <a:r>
-              <a:rPr sz="1600" b="1" i="0">
+              <a:rPr sz="1700" b="1" i="0">
                 <a:solidFill>
                   <a:srgbClr val="2B5CE6"/>
                 </a:solidFill>
@@ -6191,7 +6191,7 @@
               </a:lnSpc>
             </a:pPr>
             <a:r>
-              <a:rPr sz="1600" b="0" i="0">
+              <a:rPr sz="1700" b="0" i="0">
                 <a:solidFill>
                   <a:srgbClr val="181D27"/>
                 </a:solidFill>
@@ -6226,7 +6226,7 @@
           <a:p>
             <a:pPr algn="l"/>
             <a:r>
-              <a:rPr sz="1600" b="1" i="0">
+              <a:rPr sz="1700" b="1" i="0">
                 <a:solidFill>
                   <a:srgbClr val="2B5CE6"/>
                 </a:solidFill>
@@ -6261,9 +6261,9 @@
           <a:p>
             <a:pPr algn="ctr"/>
             <a:r>
-              <a:rPr sz="1700" b="0" i="1">
-                <a:solidFill>
-                  <a:srgbClr val="6B7484"/>
+              <a:rPr sz="1800" b="0" i="1">
+                <a:solidFill>
+                  <a:srgbClr val="181D27"/>
                 </a:solidFill>
                 <a:latin typeface="Arial"/>
               </a:rPr>
@@ -6465,7 +6465,7 @@
             <a:r>
               <a:rPr sz="1800" b="0" i="0">
                 <a:solidFill>
-                  <a:srgbClr val="6B7484"/>
+                  <a:srgbClr val="181D27"/>
                 </a:solidFill>
                 <a:latin typeface="Arial"/>
               </a:rPr>
@@ -6483,7 +6483,7 @@
         <p:spPr>
           <a:xfrm>
             <a:off x="777240" y="2487168"/>
-            <a:ext cx="10637215" cy="461010"/>
+            <a:ext cx="10637215" cy="448056"/>
           </a:xfrm>
           <a:prstGeom prst="roundRect">
             <a:avLst>
@@ -6527,7 +6527,7 @@
         </p:nvSpPr>
         <p:spPr>
           <a:xfrm>
-            <a:off x="1051560" y="2580513"/>
+            <a:off x="1051560" y="2574036"/>
             <a:ext cx="457200" cy="292608"/>
           </a:xfrm>
           <a:prstGeom prst="rect">
@@ -6562,8 +6562,8 @@
         </p:nvSpPr>
         <p:spPr>
           <a:xfrm>
-            <a:off x="777240" y="3057906"/>
-            <a:ext cx="10637215" cy="461010"/>
+            <a:off x="777240" y="3044952"/>
+            <a:ext cx="10637215" cy="448056"/>
           </a:xfrm>
           <a:prstGeom prst="roundRect">
             <a:avLst>
@@ -6609,7 +6609,7 @@
         </p:nvSpPr>
         <p:spPr>
           <a:xfrm>
-            <a:off x="1051560" y="3151251"/>
+            <a:off x="1051560" y="3131820"/>
             <a:ext cx="457200" cy="292608"/>
           </a:xfrm>
           <a:prstGeom prst="rect">
@@ -6644,7 +6644,7 @@
         </p:nvSpPr>
         <p:spPr>
           <a:xfrm>
-            <a:off x="10317175" y="3169539"/>
+            <a:off x="10317175" y="3150108"/>
             <a:ext cx="822960" cy="274320"/>
           </a:xfrm>
           <a:prstGeom prst="rect">
@@ -6679,8 +6679,8 @@
         </p:nvSpPr>
         <p:spPr>
           <a:xfrm>
-            <a:off x="777240" y="3628644"/>
-            <a:ext cx="10637215" cy="461010"/>
+            <a:off x="777240" y="3602736"/>
+            <a:ext cx="10637215" cy="448056"/>
           </a:xfrm>
           <a:prstGeom prst="roundRect">
             <a:avLst>
@@ -6724,7 +6724,7 @@
         </p:nvSpPr>
         <p:spPr>
           <a:xfrm>
-            <a:off x="1051560" y="3721989"/>
+            <a:off x="1051560" y="3689604"/>
             <a:ext cx="457200" cy="292608"/>
           </a:xfrm>
           <a:prstGeom prst="rect">
@@ -6759,8 +6759,8 @@
         </p:nvSpPr>
         <p:spPr>
           <a:xfrm>
-            <a:off x="777240" y="4199382"/>
-            <a:ext cx="10637215" cy="461010"/>
+            <a:off x="777240" y="4160520"/>
+            <a:ext cx="10637215" cy="448056"/>
           </a:xfrm>
           <a:prstGeom prst="roundRect">
             <a:avLst>
@@ -6804,7 +6804,7 @@
         </p:nvSpPr>
         <p:spPr>
           <a:xfrm>
-            <a:off x="1051560" y="4292727"/>
+            <a:off x="1051560" y="4247388"/>
             <a:ext cx="457200" cy="292608"/>
           </a:xfrm>
           <a:prstGeom prst="rect">
@@ -6839,8 +6839,8 @@
         </p:nvSpPr>
         <p:spPr>
           <a:xfrm>
-            <a:off x="777240" y="4898136"/>
-            <a:ext cx="10637215" cy="1356360"/>
+            <a:off x="777240" y="4846320"/>
+            <a:ext cx="10637215" cy="1408176"/>
           </a:xfrm>
           <a:prstGeom prst="roundRect">
             <a:avLst>
@@ -6865,7 +6865,7 @@
               </a:lnSpc>
             </a:pPr>
             <a:r>
-              <a:rPr sz="1700" b="0" i="0">
+              <a:rPr sz="1800" b="0" i="0">
                 <a:solidFill>
                   <a:srgbClr val="181D27"/>
                 </a:solidFill>
@@ -7091,7 +7091,7 @@
               <a:buChar char="—"/>
             </a:pPr>
             <a:r>
-              <a:rPr sz="1600" b="0" i="0">
+              <a:rPr sz="1700" b="0" i="0">
                 <a:solidFill>
                   <a:srgbClr val="181D27"/>
                 </a:solidFill>
@@ -7115,7 +7115,7 @@
               <a:buChar char="—"/>
             </a:pPr>
             <a:r>
-              <a:rPr sz="1600" b="0" i="0">
+              <a:rPr sz="1700" b="0" i="0">
                 <a:solidFill>
                   <a:srgbClr val="181D27"/>
                 </a:solidFill>
@@ -7139,7 +7139,7 @@
               <a:buChar char="—"/>
             </a:pPr>
             <a:r>
-              <a:rPr sz="1600" b="0" i="0">
+              <a:rPr sz="1700" b="0" i="0">
                 <a:solidFill>
                   <a:srgbClr val="181D27"/>
                 </a:solidFill>
@@ -7163,7 +7163,7 @@
               <a:buChar char="—"/>
             </a:pPr>
             <a:r>
-              <a:rPr sz="1600" b="1" i="0">
+              <a:rPr sz="1700" b="1" i="0">
                 <a:solidFill>
                   <a:srgbClr val="181D27"/>
                 </a:solidFill>
@@ -7232,7 +7232,7 @@
               <a:buChar char="—"/>
             </a:pPr>
             <a:r>
-              <a:rPr sz="1600" b="0" i="0">
+              <a:rPr sz="1700" b="0" i="0">
                 <a:solidFill>
                   <a:srgbClr val="181D27"/>
                 </a:solidFill>
@@ -7256,7 +7256,7 @@
               <a:buChar char="—"/>
             </a:pPr>
             <a:r>
-              <a:rPr sz="1600" b="0" i="0">
+              <a:rPr sz="1700" b="0" i="0">
                 <a:solidFill>
                   <a:srgbClr val="181D27"/>
                 </a:solidFill>
@@ -7280,7 +7280,7 @@
               <a:buChar char="—"/>
             </a:pPr>
             <a:r>
-              <a:rPr sz="1600" b="0" i="0">
+              <a:rPr sz="1700" b="0" i="0">
                 <a:solidFill>
                   <a:srgbClr val="181D27"/>
                 </a:solidFill>
@@ -7304,7 +7304,7 @@
               <a:buChar char="—"/>
             </a:pPr>
             <a:r>
-              <a:rPr sz="1600" b="1" i="0">
+              <a:rPr sz="1700" b="1" i="0">
                 <a:solidFill>
                   <a:srgbClr val="181D27"/>
                 </a:solidFill>
@@ -7626,9 +7626,9 @@
               </a:lnSpc>
             </a:pPr>
             <a:r>
-              <a:rPr sz="1700" b="0" i="0">
-                <a:solidFill>
-                  <a:srgbClr val="6B7484"/>
+              <a:rPr sz="1800" b="0" i="0">
+                <a:solidFill>
+                  <a:srgbClr val="181D27"/>
                 </a:solidFill>
                 <a:latin typeface="Arial"/>
               </a:rPr>
@@ -7778,9 +7778,9 @@
               </a:lnSpc>
             </a:pPr>
             <a:r>
-              <a:rPr sz="1700" b="0" i="0">
-                <a:solidFill>
-                  <a:srgbClr val="6B7484"/>
+              <a:rPr sz="1800" b="0" i="0">
+                <a:solidFill>
+                  <a:srgbClr val="181D27"/>
                 </a:solidFill>
                 <a:latin typeface="Arial"/>
               </a:rPr>
@@ -7976,7 +7976,7 @@
             <a:r>
               <a:rPr sz="2000" b="0" i="0">
                 <a:solidFill>
-                  <a:srgbClr val="6B7484"/>
+                  <a:srgbClr val="181D27"/>
                 </a:solidFill>
                 <a:latin typeface="Arial"/>
               </a:rPr>
@@ -8120,9 +8120,9 @@
               <a:buChar char="·"/>
             </a:pPr>
             <a:r>
-              <a:rPr sz="1600" b="0" i="0">
-                <a:solidFill>
-                  <a:srgbClr val="6B7484"/>
+              <a:rPr sz="1700" b="0" i="0">
+                <a:solidFill>
+                  <a:srgbClr val="181D27"/>
                 </a:solidFill>
                 <a:latin typeface="Arial"/>
               </a:rPr>
@@ -8318,7 +8318,7 @@
             <a:r>
               <a:rPr sz="2000" b="0" i="0">
                 <a:solidFill>
-                  <a:srgbClr val="6B7484"/>
+                  <a:srgbClr val="181D27"/>
                 </a:solidFill>
                 <a:latin typeface="Arial"/>
               </a:rPr>
@@ -8495,27 +8495,27 @@
               <a:buChar char="·"/>
             </a:pPr>
             <a:r>
-              <a:rPr sz="1600" b="0" i="0">
-                <a:solidFill>
-                  <a:srgbClr val="6B7484"/>
+              <a:rPr sz="1700" b="0" i="0">
+                <a:solidFill>
+                  <a:srgbClr val="181D27"/>
                 </a:solidFill>
                 <a:latin typeface="Arial"/>
               </a:rPr>
               <a:t>В </a:t>
             </a:r>
             <a:r>
-              <a:rPr sz="1600" b="0" i="0">
-                <a:solidFill>
-                  <a:srgbClr val="6B7484"/>
+              <a:rPr sz="1700" b="0" i="0">
+                <a:solidFill>
+                  <a:srgbClr val="181D27"/>
                 </a:solidFill>
                 <a:latin typeface="Courier New"/>
               </a:rPr>
               <a:t>classification_report</a:t>
             </a:r>
             <a:r>
-              <a:rPr sz="1600" b="0" i="0">
-                <a:solidFill>
-                  <a:srgbClr val="6B7484"/>
+              <a:rPr sz="1700" b="0" i="0">
+                <a:solidFill>
+                  <a:srgbClr val="181D27"/>
                 </a:solidFill>
                 <a:latin typeface="Arial"/>
               </a:rPr>
@@ -8711,7 +8711,7 @@
             <a:r>
               <a:rPr sz="2000" b="0" i="0">
                 <a:solidFill>
-                  <a:srgbClr val="6B7484"/>
+                  <a:srgbClr val="181D27"/>
                 </a:solidFill>
                 <a:latin typeface="Arial"/>
               </a:rPr>
@@ -8736,8 +8736,8 @@
         </p:blipFill>
         <p:spPr>
           <a:xfrm>
-            <a:off x="1313209" y="2048256"/>
-            <a:ext cx="9565278" cy="3203448"/>
+            <a:off x="1390568" y="2048256"/>
+            <a:ext cx="9410559" cy="3151632"/>
           </a:xfrm>
           <a:prstGeom prst="rect">
             <a:avLst/>
@@ -8752,8 +8752,8 @@
         </p:nvSpPr>
         <p:spPr>
           <a:xfrm>
-            <a:off x="777240" y="5452872"/>
-            <a:ext cx="10637215" cy="1103376"/>
+            <a:off x="777240" y="5401056"/>
+            <a:ext cx="10637215" cy="1155192"/>
           </a:xfrm>
           <a:prstGeom prst="rect">
             <a:avLst/>
@@ -8772,9 +8772,9 @@
               </a:lnSpc>
             </a:pPr>
             <a:r>
-              <a:rPr sz="1600" b="0" i="0">
-                <a:solidFill>
-                  <a:srgbClr val="6B7484"/>
+              <a:rPr sz="1700" b="0" i="0">
+                <a:solidFill>
+                  <a:srgbClr val="181D27"/>
                 </a:solidFill>
                 <a:latin typeface="Arial"/>
               </a:rPr>
@@ -8970,7 +8970,7 @@
             <a:r>
               <a:rPr sz="2000" b="0" i="0">
                 <a:solidFill>
-                  <a:srgbClr val="6B7484"/>
+                  <a:srgbClr val="181D27"/>
                 </a:solidFill>
                 <a:latin typeface="Arial"/>
               </a:rPr>
@@ -9171,9 +9171,9 @@
               <a:buChar char="·"/>
             </a:pPr>
             <a:r>
-              <a:rPr sz="1600" b="0" i="0">
-                <a:solidFill>
-                  <a:srgbClr val="6B7484"/>
+              <a:rPr sz="1700" b="0" i="0">
+                <a:solidFill>
+                  <a:srgbClr val="181D27"/>
                 </a:solidFill>
                 <a:latin typeface="Arial"/>
               </a:rPr>
@@ -9410,7 +9410,7 @@
               <a:buChar char="—"/>
             </a:pPr>
             <a:r>
-              <a:rPr sz="1600" b="0" i="0">
+              <a:rPr sz="1700" b="0" i="0">
                 <a:solidFill>
                   <a:srgbClr val="181D27"/>
                 </a:solidFill>
@@ -9434,7 +9434,7 @@
               <a:buChar char="—"/>
             </a:pPr>
             <a:r>
-              <a:rPr sz="1600" b="0" i="0">
+              <a:rPr sz="1700" b="0" i="0">
                 <a:solidFill>
                   <a:srgbClr val="181D27"/>
                 </a:solidFill>
@@ -9458,7 +9458,7 @@
               <a:buChar char="—"/>
             </a:pPr>
             <a:r>
-              <a:rPr sz="1600" b="0" i="0">
+              <a:rPr sz="1700" b="0" i="0">
                 <a:solidFill>
                   <a:srgbClr val="181D27"/>
                 </a:solidFill>
@@ -9482,7 +9482,7 @@
               <a:buChar char="—"/>
             </a:pPr>
             <a:r>
-              <a:rPr sz="1600" b="1" i="0">
+              <a:rPr sz="1700" b="1" i="0">
                 <a:solidFill>
                   <a:srgbClr val="181D27"/>
                 </a:solidFill>
@@ -9491,7 +9491,7 @@
               <a:t>Проблема:</a:t>
             </a:r>
             <a:r>
-              <a:rPr sz="1600" b="0" i="0">
+              <a:rPr sz="1700" b="0" i="0">
                 <a:solidFill>
                   <a:srgbClr val="181D27"/>
                 </a:solidFill>
@@ -9573,7 +9573,7 @@
               <a:buChar char="—"/>
             </a:pPr>
             <a:r>
-              <a:rPr sz="1600" b="0" i="0">
+              <a:rPr sz="1700" b="0" i="0">
                 <a:solidFill>
                   <a:srgbClr val="181D27"/>
                 </a:solidFill>
@@ -9597,7 +9597,7 @@
               <a:buChar char="—"/>
             </a:pPr>
             <a:r>
-              <a:rPr sz="1600" b="0" i="0">
+              <a:rPr sz="1700" b="0" i="0">
                 <a:solidFill>
                   <a:srgbClr val="181D27"/>
                 </a:solidFill>
@@ -9621,7 +9621,7 @@
               <a:buChar char="—"/>
             </a:pPr>
             <a:r>
-              <a:rPr sz="1600" b="1" i="0">
+              <a:rPr sz="1700" b="1" i="0">
                 <a:solidFill>
                   <a:srgbClr val="181D27"/>
                 </a:solidFill>
@@ -9645,7 +9645,7 @@
               <a:buChar char="—"/>
             </a:pPr>
             <a:r>
-              <a:rPr sz="1600" b="0" i="0">
+              <a:rPr sz="1700" b="0" i="0">
                 <a:solidFill>
                   <a:srgbClr val="181D27"/>
                 </a:solidFill>
@@ -9829,8 +9829,8 @@
         </p:blipFill>
         <p:spPr>
           <a:xfrm>
-            <a:off x="1039493" y="1572768"/>
-            <a:ext cx="10112709" cy="3955288"/>
+            <a:off x="1083653" y="1572768"/>
+            <a:ext cx="10024389" cy="3920744"/>
           </a:xfrm>
           <a:prstGeom prst="rect">
             <a:avLst/>
@@ -9845,8 +9845,8 @@
         </p:nvSpPr>
         <p:spPr>
           <a:xfrm>
-            <a:off x="777240" y="5729224"/>
-            <a:ext cx="10637215" cy="827024"/>
+            <a:off x="777240" y="5694680"/>
+            <a:ext cx="10637215" cy="861568"/>
           </a:xfrm>
           <a:prstGeom prst="rect">
             <a:avLst/>
@@ -9865,9 +9865,9 @@
               </a:lnSpc>
             </a:pPr>
             <a:r>
-              <a:rPr sz="1600" b="0" i="0">
-                <a:solidFill>
-                  <a:srgbClr val="6B7484"/>
+              <a:rPr sz="1700" b="0" i="0">
+                <a:solidFill>
+                  <a:srgbClr val="181D27"/>
                 </a:solidFill>
                 <a:latin typeface="Arial"/>
               </a:rPr>
@@ -10017,9 +10017,9 @@
               </a:lnSpc>
             </a:pPr>
             <a:r>
-              <a:rPr sz="1700" b="0" i="0">
-                <a:solidFill>
-                  <a:srgbClr val="6B7484"/>
+              <a:rPr sz="1800" b="0" i="0">
+                <a:solidFill>
+                  <a:srgbClr val="181D27"/>
                 </a:solidFill>
                 <a:latin typeface="Arial"/>
               </a:rPr>
@@ -10220,7 +10220,7 @@
             <a:r>
               <a:rPr sz="1800" b="0" i="0">
                 <a:solidFill>
-                  <a:srgbClr val="6B7484"/>
+                  <a:srgbClr val="181D27"/>
                 </a:solidFill>
                 <a:latin typeface="Arial"/>
               </a:rPr>
@@ -10376,7 +10376,7 @@
             <a:r>
               <a:rPr sz="2000" b="0" i="0">
                 <a:solidFill>
-                  <a:srgbClr val="6B7484"/>
+                  <a:srgbClr val="181D27"/>
                 </a:solidFill>
                 <a:latin typeface="Arial"/>
               </a:rPr>
@@ -10520,9 +10520,9 @@
               <a:buChar char="·"/>
             </a:pPr>
             <a:r>
-              <a:rPr sz="1600" b="0" i="0">
-                <a:solidFill>
-                  <a:srgbClr val="6B7484"/>
+              <a:rPr sz="1700" b="0" i="0">
+                <a:solidFill>
+                  <a:srgbClr val="181D27"/>
                 </a:solidFill>
                 <a:latin typeface="Arial"/>
               </a:rPr>
@@ -11318,7 +11318,7 @@
             <a:r>
               <a:rPr sz="1400" b="0" i="0">
                 <a:solidFill>
-                  <a:srgbClr val="6B7484"/>
+                  <a:srgbClr val="181D27"/>
                 </a:solidFill>
                 <a:latin typeface="Arial"/>
               </a:rPr>
@@ -11411,7 +11411,7 @@
             <a:r>
               <a:rPr sz="1400" b="0" i="0">
                 <a:solidFill>
-                  <a:srgbClr val="6B7484"/>
+                  <a:srgbClr val="181D27"/>
                 </a:solidFill>
                 <a:latin typeface="Arial"/>
               </a:rPr>
@@ -11427,7 +11427,7 @@
             <a:r>
               <a:rPr sz="1400" b="0" i="0">
                 <a:solidFill>
-                  <a:srgbClr val="6B7484"/>
+                  <a:srgbClr val="181D27"/>
                 </a:solidFill>
                 <a:latin typeface="Arial"/>
               </a:rPr>
@@ -11520,7 +11520,7 @@
             <a:r>
               <a:rPr sz="1400" b="0" i="0">
                 <a:solidFill>
-                  <a:srgbClr val="6B7484"/>
+                  <a:srgbClr val="181D27"/>
                 </a:solidFill>
                 <a:latin typeface="Arial"/>
               </a:rPr>
@@ -11536,7 +11536,7 @@
             <a:r>
               <a:rPr sz="1400" b="0" i="0">
                 <a:solidFill>
-                  <a:srgbClr val="6B7484"/>
+                  <a:srgbClr val="181D27"/>
                 </a:solidFill>
                 <a:latin typeface="Arial"/>
               </a:rPr>
@@ -11573,9 +11573,9 @@
               </a:lnSpc>
             </a:pPr>
             <a:r>
-              <a:rPr sz="1600" b="0" i="0">
-                <a:solidFill>
-                  <a:srgbClr val="6B7484"/>
+              <a:rPr sz="1700" b="0" i="0">
+                <a:solidFill>
+                  <a:srgbClr val="181D27"/>
                 </a:solidFill>
                 <a:latin typeface="Arial"/>
               </a:rPr>
@@ -11774,7 +11774,7 @@
         <p:spPr>
           <a:xfrm>
             <a:off x="777240" y="4892884"/>
-            <a:ext cx="10637215" cy="1103376"/>
+            <a:ext cx="10637215" cy="1155192"/>
           </a:xfrm>
           <a:prstGeom prst="rect">
             <a:avLst/>
@@ -11793,9 +11793,9 @@
               </a:lnSpc>
             </a:pPr>
             <a:r>
-              <a:rPr sz="1600" b="0" i="0">
-                <a:solidFill>
-                  <a:srgbClr val="6B7484"/>
+              <a:rPr sz="1700" b="0" i="0">
+                <a:solidFill>
+                  <a:srgbClr val="181D27"/>
                 </a:solidFill>
                 <a:latin typeface="Arial"/>
               </a:rPr>
@@ -11997,7 +11997,7 @@
                       <a:r>
                         <a:rPr sz="1500" b="1" i="0">
                           <a:solidFill>
-                            <a:srgbClr val="6B7484"/>
+                            <a:srgbClr val="181D27"/>
                           </a:solidFill>
                           <a:latin typeface="Arial"/>
                         </a:rPr>
@@ -12033,7 +12033,7 @@
                       <a:r>
                         <a:rPr sz="1500" b="1" i="0">
                           <a:solidFill>
-                            <a:srgbClr val="6B7484"/>
+                            <a:srgbClr val="181D27"/>
                           </a:solidFill>
                           <a:latin typeface="Arial"/>
                         </a:rPr>
@@ -12618,7 +12618,7 @@
             <a:r>
               <a:rPr sz="2000" b="0" i="0">
                 <a:solidFill>
-                  <a:srgbClr val="6B7484"/>
+                  <a:srgbClr val="181D27"/>
                 </a:solidFill>
                 <a:latin typeface="Arial"/>
               </a:rPr>
@@ -12828,9 +12828,9 @@
               <a:buChar char="·"/>
             </a:pPr>
             <a:r>
-              <a:rPr sz="1600" b="0" i="0">
-                <a:solidFill>
-                  <a:srgbClr val="6B7484"/>
+              <a:rPr sz="1700" b="0" i="0">
+                <a:solidFill>
+                  <a:srgbClr val="181D27"/>
                 </a:solidFill>
                 <a:latin typeface="Arial"/>
               </a:rPr>
@@ -13054,7 +13054,7 @@
               <a:buChar char="—"/>
             </a:pPr>
             <a:r>
-              <a:rPr sz="1600" b="0" i="0">
+              <a:rPr sz="1700" b="0" i="0">
                 <a:solidFill>
                   <a:srgbClr val="181D27"/>
                 </a:solidFill>
@@ -13078,7 +13078,7 @@
               <a:buChar char="—"/>
             </a:pPr>
             <a:r>
-              <a:rPr sz="1600" b="0" i="0">
+              <a:rPr sz="1700" b="0" i="0">
                 <a:solidFill>
                   <a:srgbClr val="181D27"/>
                 </a:solidFill>
@@ -13102,7 +13102,7 @@
               <a:buChar char="—"/>
             </a:pPr>
             <a:r>
-              <a:rPr sz="1600" b="0" i="0">
+              <a:rPr sz="1700" b="0" i="0">
                 <a:solidFill>
                   <a:srgbClr val="181D27"/>
                 </a:solidFill>
@@ -13126,7 +13126,7 @@
               <a:buChar char="—"/>
             </a:pPr>
             <a:r>
-              <a:rPr sz="1600" b="1" i="0">
+              <a:rPr sz="1700" b="1" i="0">
                 <a:solidFill>
                   <a:srgbClr val="181D27"/>
                 </a:solidFill>
@@ -13135,7 +13135,7 @@
               <a:t>Лечение:</a:t>
             </a:r>
             <a:r>
-              <a:rPr sz="1600" b="0" i="0">
+              <a:rPr sz="1700" b="0" i="0">
                 <a:solidFill>
                   <a:srgbClr val="181D27"/>
                 </a:solidFill>
@@ -13204,7 +13204,7 @@
               <a:buChar char="—"/>
             </a:pPr>
             <a:r>
-              <a:rPr sz="1600" b="0" i="0">
+              <a:rPr sz="1700" b="0" i="0">
                 <a:solidFill>
                   <a:srgbClr val="181D27"/>
                 </a:solidFill>
@@ -13228,7 +13228,7 @@
               <a:buChar char="—"/>
             </a:pPr>
             <a:r>
-              <a:rPr sz="1600" b="0" i="0">
+              <a:rPr sz="1700" b="0" i="0">
                 <a:solidFill>
                   <a:srgbClr val="181D27"/>
                 </a:solidFill>
@@ -13252,7 +13252,7 @@
               <a:buChar char="—"/>
             </a:pPr>
             <a:r>
-              <a:rPr sz="1600" b="0" i="0">
+              <a:rPr sz="1700" b="0" i="0">
                 <a:solidFill>
                   <a:srgbClr val="181D27"/>
                 </a:solidFill>
@@ -13276,7 +13276,7 @@
               <a:buChar char="—"/>
             </a:pPr>
             <a:r>
-              <a:rPr sz="1600" b="1" i="0">
+              <a:rPr sz="1700" b="1" i="0">
                 <a:solidFill>
                   <a:srgbClr val="181D27"/>
                 </a:solidFill>
@@ -13285,7 +13285,7 @@
               <a:t>Лечение:</a:t>
             </a:r>
             <a:r>
-              <a:rPr sz="1600" b="0" i="0">
+              <a:rPr sz="1700" b="0" i="0">
                 <a:solidFill>
                   <a:srgbClr val="181D27"/>
                 </a:solidFill>
@@ -13532,7 +13532,7 @@
               </a:lnSpc>
             </a:pPr>
             <a:r>
-              <a:rPr sz="1600" b="0" i="0">
+              <a:rPr sz="1700" b="0" i="0">
                 <a:solidFill>
                   <a:srgbClr val="181D27"/>
                 </a:solidFill>
@@ -13567,7 +13567,7 @@
           <a:p>
             <a:pPr algn="l"/>
             <a:r>
-              <a:rPr sz="1600" b="1" i="0">
+              <a:rPr sz="1700" b="1" i="0">
                 <a:solidFill>
                   <a:srgbClr val="2B5CE6"/>
                 </a:solidFill>
@@ -13612,7 +13612,7 @@
               </a:lnSpc>
             </a:pPr>
             <a:r>
-              <a:rPr sz="1600" b="0" i="0">
+              <a:rPr sz="1700" b="0" i="0">
                 <a:solidFill>
                   <a:srgbClr val="181D27"/>
                 </a:solidFill>
@@ -13647,7 +13647,7 @@
           <a:p>
             <a:pPr algn="l"/>
             <a:r>
-              <a:rPr sz="1600" b="1" i="0">
+              <a:rPr sz="1700" b="1" i="0">
                 <a:solidFill>
                   <a:srgbClr val="2B5CE6"/>
                 </a:solidFill>
@@ -13692,7 +13692,7 @@
               </a:lnSpc>
             </a:pPr>
             <a:r>
-              <a:rPr sz="1600" b="0" i="0">
+              <a:rPr sz="1700" b="0" i="0">
                 <a:solidFill>
                   <a:srgbClr val="181D27"/>
                 </a:solidFill>
@@ -13727,7 +13727,7 @@
           <a:p>
             <a:pPr algn="l"/>
             <a:r>
-              <a:rPr sz="1600" b="1" i="0">
+              <a:rPr sz="1700" b="1" i="0">
                 <a:solidFill>
                   <a:srgbClr val="2B5CE6"/>
                 </a:solidFill>
@@ -13772,7 +13772,7 @@
               </a:lnSpc>
             </a:pPr>
             <a:r>
-              <a:rPr sz="1600" b="0" i="0">
+              <a:rPr sz="1700" b="0" i="0">
                 <a:solidFill>
                   <a:srgbClr val="181D27"/>
                 </a:solidFill>
@@ -13807,7 +13807,7 @@
           <a:p>
             <a:pPr algn="l"/>
             <a:r>
-              <a:rPr sz="1600" b="1" i="0">
+              <a:rPr sz="1700" b="1" i="0">
                 <a:solidFill>
                   <a:srgbClr val="2B5CE6"/>
                 </a:solidFill>
@@ -13842,9 +13842,9 @@
           <a:p>
             <a:pPr algn="ctr"/>
             <a:r>
-              <a:rPr sz="1700" b="0" i="1">
-                <a:solidFill>
-                  <a:srgbClr val="6B7484"/>
+              <a:rPr sz="1800" b="0" i="1">
+                <a:solidFill>
+                  <a:srgbClr val="181D27"/>
                 </a:solidFill>
                 <a:latin typeface="Arial"/>
               </a:rPr>
@@ -14046,7 +14046,7 @@
             <a:r>
               <a:rPr sz="1800" b="0" i="0">
                 <a:solidFill>
-                  <a:srgbClr val="6B7484"/>
+                  <a:srgbClr val="181D27"/>
                 </a:solidFill>
                 <a:latin typeface="Arial"/>
               </a:rPr>
@@ -14446,7 +14446,7 @@
               </a:lnSpc>
             </a:pPr>
             <a:r>
-              <a:rPr sz="1700" b="0" i="0">
+              <a:rPr sz="1800" b="0" i="0">
                 <a:solidFill>
                   <a:srgbClr val="181D27"/>
                 </a:solidFill>
@@ -14644,7 +14644,7 @@
             <a:r>
               <a:rPr sz="2000" b="0" i="0">
                 <a:solidFill>
-                  <a:srgbClr val="6B7484"/>
+                  <a:srgbClr val="181D27"/>
                 </a:solidFill>
                 <a:latin typeface="Arial"/>
               </a:rPr>
@@ -15004,7 +15004,7 @@
             <a:r>
               <a:rPr sz="1400" b="0" i="0">
                 <a:solidFill>
-                  <a:srgbClr val="6B7484"/>
+                  <a:srgbClr val="181D27"/>
                 </a:solidFill>
                 <a:latin typeface="Arial"/>
               </a:rPr>
@@ -15097,7 +15097,7 @@
             <a:r>
               <a:rPr sz="1400" b="0" i="0">
                 <a:solidFill>
-                  <a:srgbClr val="6B7484"/>
+                  <a:srgbClr val="181D27"/>
                 </a:solidFill>
                 <a:latin typeface="Arial"/>
               </a:rPr>
@@ -15190,7 +15190,7 @@
             <a:r>
               <a:rPr sz="1400" b="0" i="0">
                 <a:solidFill>
-                  <a:srgbClr val="6B7484"/>
+                  <a:srgbClr val="181D27"/>
                 </a:solidFill>
                 <a:latin typeface="Arial"/>
               </a:rPr>
@@ -15227,9 +15227,9 @@
               </a:lnSpc>
             </a:pPr>
             <a:r>
-              <a:rPr sz="1600" b="0" i="0">
-                <a:solidFill>
-                  <a:srgbClr val="6B7484"/>
+              <a:rPr sz="1500" b="0" i="0">
+                <a:solidFill>
+                  <a:srgbClr val="181D27"/>
                 </a:solidFill>
                 <a:latin typeface="Arial"/>
               </a:rPr>
@@ -15425,7 +15425,7 @@
             <a:r>
               <a:rPr sz="2000" b="0" i="0">
                 <a:solidFill>
-                  <a:srgbClr val="6B7484"/>
+                  <a:srgbClr val="181D27"/>
                 </a:solidFill>
                 <a:latin typeface="Arial"/>
               </a:rPr>
@@ -16374,7 +16374,7 @@
                       <a:r>
                         <a:rPr sz="1500" b="1" i="0">
                           <a:solidFill>
-                            <a:srgbClr val="6B7484"/>
+                            <a:srgbClr val="181D27"/>
                           </a:solidFill>
                           <a:latin typeface="Arial"/>
                         </a:rPr>
@@ -16410,7 +16410,7 @@
                       <a:r>
                         <a:rPr sz="1500" b="1" i="0">
                           <a:solidFill>
-                            <a:srgbClr val="6B7484"/>
+                            <a:srgbClr val="181D27"/>
                           </a:solidFill>
                           <a:latin typeface="Arial"/>
                         </a:rPr>
@@ -16762,9 +16762,9 @@
               </a:lnSpc>
             </a:pPr>
             <a:r>
-              <a:rPr sz="1600" b="0" i="0">
-                <a:solidFill>
-                  <a:srgbClr val="6B7484"/>
+              <a:rPr sz="1500" b="0" i="0">
+                <a:solidFill>
+                  <a:srgbClr val="181D27"/>
                 </a:solidFill>
                 <a:latin typeface="Arial"/>
               </a:rPr>
@@ -16967,7 +16967,7 @@
                       <a:r>
                         <a:rPr sz="1500" b="1" i="0">
                           <a:solidFill>
-                            <a:srgbClr val="6B7484"/>
+                            <a:srgbClr val="181D27"/>
                           </a:solidFill>
                           <a:latin typeface="Arial"/>
                         </a:rPr>
@@ -17003,7 +17003,7 @@
                       <a:r>
                         <a:rPr sz="1500" b="1" i="0">
                           <a:solidFill>
-                            <a:srgbClr val="6B7484"/>
+                            <a:srgbClr val="181D27"/>
                           </a:solidFill>
                           <a:latin typeface="Arial"/>
                         </a:rPr>
@@ -17039,7 +17039,7 @@
                       <a:r>
                         <a:rPr sz="1500" b="1" i="0">
                           <a:solidFill>
-                            <a:srgbClr val="6B7484"/>
+                            <a:srgbClr val="181D27"/>
                           </a:solidFill>
                           <a:latin typeface="Arial"/>
                         </a:rPr>
@@ -17648,9 +17648,9 @@
               </a:lnSpc>
             </a:pPr>
             <a:r>
-              <a:rPr sz="1700" b="0" i="0">
-                <a:solidFill>
-                  <a:srgbClr val="6B7484"/>
+              <a:rPr sz="1800" b="0" i="0">
+                <a:solidFill>
+                  <a:srgbClr val="181D27"/>
                 </a:solidFill>
                 <a:latin typeface="Arial"/>
               </a:rPr>
@@ -17832,8 +17832,8 @@
         </p:blipFill>
         <p:spPr>
           <a:xfrm>
-            <a:off x="1270646" y="1572768"/>
-            <a:ext cx="9650402" cy="3955288"/>
+            <a:off x="1312788" y="1572768"/>
+            <a:ext cx="9566119" cy="3920744"/>
           </a:xfrm>
           <a:prstGeom prst="rect">
             <a:avLst/>
@@ -17848,8 +17848,8 @@
         </p:nvSpPr>
         <p:spPr>
           <a:xfrm>
-            <a:off x="777240" y="5729224"/>
-            <a:ext cx="10637215" cy="827024"/>
+            <a:off x="777240" y="5694680"/>
+            <a:ext cx="10637215" cy="861568"/>
           </a:xfrm>
           <a:prstGeom prst="rect">
             <a:avLst/>
@@ -17868,9 +17868,9 @@
               </a:lnSpc>
             </a:pPr>
             <a:r>
-              <a:rPr sz="1600" b="0" i="0">
-                <a:solidFill>
-                  <a:srgbClr val="6B7484"/>
+              <a:rPr sz="1700" b="0" i="0">
+                <a:solidFill>
+                  <a:srgbClr val="181D27"/>
                 </a:solidFill>
                 <a:latin typeface="Arial"/>
               </a:rPr>
@@ -18445,9 +18445,9 @@
               </a:lnSpc>
             </a:pPr>
             <a:r>
-              <a:rPr sz="1600" b="0" i="0">
-                <a:solidFill>
-                  <a:srgbClr val="6B7484"/>
+              <a:rPr sz="1700" b="0" i="0">
+                <a:solidFill>
+                  <a:srgbClr val="181D27"/>
                 </a:solidFill>
                 <a:latin typeface="Arial"/>
               </a:rPr>
@@ -18910,9 +18910,9 @@
               </a:lnSpc>
             </a:pPr>
             <a:r>
-              <a:rPr sz="1600" b="0" i="0">
-                <a:solidFill>
-                  <a:srgbClr val="6B7484"/>
+              <a:rPr sz="1700" b="0" i="0">
+                <a:solidFill>
+                  <a:srgbClr val="181D27"/>
                 </a:solidFill>
                 <a:latin typeface="Arial"/>
               </a:rPr>
@@ -19359,9 +19359,9 @@
               </a:lnSpc>
             </a:pPr>
             <a:r>
-              <a:rPr sz="1600" b="0" i="0">
-                <a:solidFill>
-                  <a:srgbClr val="6B7484"/>
+              <a:rPr sz="1700" b="0" i="0">
+                <a:solidFill>
+                  <a:srgbClr val="181D27"/>
                 </a:solidFill>
                 <a:latin typeface="Arial"/>
               </a:rPr>
@@ -19557,7 +19557,7 @@
             <a:r>
               <a:rPr sz="2000" b="0" i="0">
                 <a:solidFill>
-                  <a:srgbClr val="6B7484"/>
+                  <a:srgbClr val="181D27"/>
                 </a:solidFill>
                 <a:latin typeface="Arial"/>
               </a:rPr>
@@ -19863,9 +19863,9 @@
               </a:lnSpc>
             </a:pPr>
             <a:r>
-              <a:rPr sz="1600" b="0" i="0">
-                <a:solidFill>
-                  <a:srgbClr val="6B7484"/>
+              <a:rPr sz="1700" b="0" i="0">
+                <a:solidFill>
+                  <a:srgbClr val="181D27"/>
                 </a:solidFill>
                 <a:latin typeface="Arial"/>
               </a:rPr>
@@ -20981,7 +20981,7 @@
               <a:buChar char="—"/>
             </a:pPr>
             <a:r>
-              <a:rPr sz="1600" b="0" i="0">
+              <a:rPr sz="1700" b="0" i="0">
                 <a:solidFill>
                   <a:srgbClr val="181D27"/>
                 </a:solidFill>
@@ -21005,7 +21005,7 @@
               <a:buChar char="—"/>
             </a:pPr>
             <a:r>
-              <a:rPr sz="1600" b="0" i="0">
+              <a:rPr sz="1700" b="0" i="0">
                 <a:solidFill>
                   <a:srgbClr val="181D27"/>
                 </a:solidFill>
@@ -21014,7 +21014,7 @@
               <a:t>После практики выдаётся </a:t>
             </a:r>
             <a:r>
-              <a:rPr sz="1600" b="1" i="0">
+              <a:rPr sz="1700" b="1" i="0">
                 <a:solidFill>
                   <a:srgbClr val="181D27"/>
                 </a:solidFill>
@@ -21023,7 +21023,7 @@
               <a:t>домашняя работа 2</a:t>
             </a:r>
             <a:r>
-              <a:rPr sz="1600" b="0" i="0">
+              <a:rPr sz="1700" b="0" i="0">
                 <a:solidFill>
                   <a:srgbClr val="181D27"/>
                 </a:solidFill>
@@ -21105,7 +21105,7 @@
               <a:buChar char="—"/>
             </a:pPr>
             <a:r>
-              <a:rPr sz="1600" b="0" i="0">
+              <a:rPr sz="1700" b="0" i="0">
                 <a:solidFill>
                   <a:srgbClr val="181D27"/>
                 </a:solidFill>
@@ -21129,7 +21129,7 @@
               <a:buChar char="—"/>
             </a:pPr>
             <a:r>
-              <a:rPr sz="1600" b="0" i="0">
+              <a:rPr sz="1700" b="0" i="0">
                 <a:solidFill>
                   <a:srgbClr val="181D27"/>
                 </a:solidFill>
@@ -21153,7 +21153,7 @@
               <a:buChar char="—"/>
             </a:pPr>
             <a:r>
-              <a:rPr sz="1600" b="0" i="0">
+              <a:rPr sz="1700" b="0" i="0">
                 <a:solidFill>
                   <a:srgbClr val="181D27"/>
                 </a:solidFill>
@@ -21358,7 +21358,7 @@
                       <a:r>
                         <a:rPr sz="1500" b="1" i="0">
                           <a:solidFill>
-                            <a:srgbClr val="6B7484"/>
+                            <a:srgbClr val="181D27"/>
                           </a:solidFill>
                           <a:latin typeface="Arial"/>
                         </a:rPr>
@@ -21394,7 +21394,7 @@
                       <a:r>
                         <a:rPr sz="1500" b="1" i="0">
                           <a:solidFill>
-                            <a:srgbClr val="6B7484"/>
+                            <a:srgbClr val="181D27"/>
                           </a:solidFill>
                           <a:latin typeface="Arial"/>
                         </a:rPr>
@@ -21430,7 +21430,7 @@
                       <a:r>
                         <a:rPr sz="1500" b="1" i="0">
                           <a:solidFill>
-                            <a:srgbClr val="6B7484"/>
+                            <a:srgbClr val="181D27"/>
                           </a:solidFill>
                           <a:latin typeface="Arial"/>
                         </a:rPr>
@@ -22146,9 +22146,9 @@
               </a:lnSpc>
             </a:pPr>
             <a:r>
-              <a:rPr sz="1700" b="0" i="0">
-                <a:solidFill>
-                  <a:srgbClr val="6B7484"/>
+              <a:rPr sz="1800" b="0" i="0">
+                <a:solidFill>
+                  <a:srgbClr val="181D27"/>
                 </a:solidFill>
                 <a:latin typeface="Arial"/>
               </a:rPr>
@@ -22349,7 +22349,7 @@
             <a:r>
               <a:rPr sz="1800" b="0" i="0">
                 <a:solidFill>
-                  <a:srgbClr val="6B7484"/>
+                  <a:srgbClr val="181D27"/>
                 </a:solidFill>
                 <a:latin typeface="Arial"/>
               </a:rPr>
@@ -22554,7 +22554,7 @@
               </a:lnSpc>
             </a:pPr>
             <a:r>
-              <a:rPr sz="1600" b="0" i="0">
+              <a:rPr sz="1700" b="0" i="0">
                 <a:solidFill>
                   <a:srgbClr val="181D27"/>
                 </a:solidFill>
@@ -22589,7 +22589,7 @@
           <a:p>
             <a:pPr algn="l"/>
             <a:r>
-              <a:rPr sz="1600" b="1" i="0">
+              <a:rPr sz="1700" b="1" i="0">
                 <a:solidFill>
                   <a:srgbClr val="2B5CE6"/>
                 </a:solidFill>
@@ -22634,7 +22634,7 @@
               </a:lnSpc>
             </a:pPr>
             <a:r>
-              <a:rPr sz="1600" b="0" i="0">
+              <a:rPr sz="1700" b="0" i="0">
                 <a:solidFill>
                   <a:srgbClr val="181D27"/>
                 </a:solidFill>
@@ -22669,7 +22669,7 @@
           <a:p>
             <a:pPr algn="l"/>
             <a:r>
-              <a:rPr sz="1600" b="1" i="0">
+              <a:rPr sz="1700" b="1" i="0">
                 <a:solidFill>
                   <a:srgbClr val="2B5CE6"/>
                 </a:solidFill>
@@ -22714,7 +22714,7 @@
               </a:lnSpc>
             </a:pPr>
             <a:r>
-              <a:rPr sz="1600" b="0" i="0">
+              <a:rPr sz="1700" b="0" i="0">
                 <a:solidFill>
                   <a:srgbClr val="181D27"/>
                 </a:solidFill>
@@ -22749,7 +22749,7 @@
           <a:p>
             <a:pPr algn="l"/>
             <a:r>
-              <a:rPr sz="1600" b="1" i="0">
+              <a:rPr sz="1700" b="1" i="0">
                 <a:solidFill>
                   <a:srgbClr val="2B5CE6"/>
                 </a:solidFill>
@@ -22794,7 +22794,7 @@
               </a:lnSpc>
             </a:pPr>
             <a:r>
-              <a:rPr sz="1600" b="0" i="0">
+              <a:rPr sz="1700" b="0" i="0">
                 <a:solidFill>
                   <a:srgbClr val="181D27"/>
                 </a:solidFill>
@@ -22829,7 +22829,7 @@
           <a:p>
             <a:pPr algn="l"/>
             <a:r>
-              <a:rPr sz="1600" b="1" i="0">
+              <a:rPr sz="1700" b="1" i="0">
                 <a:solidFill>
                   <a:srgbClr val="2B5CE6"/>
                 </a:solidFill>
@@ -22864,9 +22864,9 @@
           <a:p>
             <a:pPr algn="ctr"/>
             <a:r>
-              <a:rPr sz="1700" b="0" i="1">
-                <a:solidFill>
-                  <a:srgbClr val="6B7484"/>
+              <a:rPr sz="1800" b="0" i="1">
+                <a:solidFill>
+                  <a:srgbClr val="181D27"/>
                 </a:solidFill>
                 <a:latin typeface="Arial"/>
               </a:rPr>
